--- a/Review 2 PPT Template 34 (1).pptx
+++ b/Review 2 PPT Template 34 (1).pptx
@@ -203,7 +203,7 @@
           <a:p>
             <a:fld id="{1D8BD707-D9CF-40AE-B4C6-C98DA3205C09}" type="datetimeFigureOut">
               <a:rPr lang="en-US"/>
-              <a:t>10/10/2025</a:t>
+              <a:t>2/6/2026</a:t>
             </a:fld>
             <a:endParaRPr lang="en-US"/>
           </a:p>
@@ -384,7 +384,7 @@
           <a:p>
             <a:fld id="{1D8BD707-D9CF-40AE-B4C6-C98DA3205C09}" type="datetimeFigureOut">
               <a:rPr lang="en-US"/>
-              <a:t>10/10/2025</a:t>
+              <a:t>2/6/2026</a:t>
             </a:fld>
             <a:endParaRPr lang="en-US"/>
           </a:p>
@@ -604,7 +604,7 @@
           <a:p>
             <a:fld id="{1D8BD707-D9CF-40AE-B4C6-C98DA3205C09}" type="datetimeFigureOut">
               <a:rPr lang="en-US"/>
-              <a:t>10/10/2025</a:t>
+              <a:t>2/6/2026</a:t>
             </a:fld>
             <a:endParaRPr lang="en-US"/>
           </a:p>
@@ -758,7 +758,7 @@
           <a:p>
             <a:fld id="{1D8BD707-D9CF-40AE-B4C6-C98DA3205C09}" type="datetimeFigureOut">
               <a:rPr lang="en-US"/>
-              <a:t>10/10/2025</a:t>
+              <a:t>2/6/2026</a:t>
             </a:fld>
             <a:endParaRPr lang="en-US"/>
           </a:p>
@@ -883,7 +883,7 @@
           <a:p>
             <a:fld id="{1D8BD707-D9CF-40AE-B4C6-C98DA3205C09}" type="datetimeFigureOut">
               <a:rPr lang="en-US"/>
-              <a:t>10/10/2025</a:t>
+              <a:t>2/6/2026</a:t>
             </a:fld>
             <a:endParaRPr lang="en-US"/>
           </a:p>
@@ -1134,7 +1134,7 @@
           <a:p>
             <a:fld id="{1D8BD707-D9CF-40AE-B4C6-C98DA3205C09}" type="datetimeFigureOut">
               <a:rPr lang="en-US"/>
-              <a:t>10/10/2025</a:t>
+              <a:t>2/6/2026</a:t>
             </a:fld>
             <a:endParaRPr lang="en-US"/>
           </a:p>
@@ -1479,6 +1479,16 @@
               <a:t>I</a:t>
             </a:r>
             <a:r>
+              <a:rPr lang="en-US" sz="2400" b="1" spc="-20" dirty="0">
+                <a:solidFill>
+                  <a:srgbClr val="943733"/>
+                </a:solidFill>
+                <a:latin typeface="Calibri"/>
+                <a:cs typeface="Calibri"/>
+              </a:rPr>
+              <a:t>II</a:t>
+            </a:r>
+            <a:r>
               <a:rPr sz="2400" b="1" spc="-20" dirty="0">
                 <a:solidFill>
                   <a:srgbClr val="943733"/>
@@ -1496,70 +1506,20 @@
                 <a:latin typeface="Calibri"/>
                 <a:cs typeface="Calibri"/>
               </a:rPr>
-              <a:t>/</a:t>
-            </a:r>
-            <a:r>
-              <a:rPr sz="2400" b="1" spc="-15" dirty="0">
+              <a:t>P</a:t>
+            </a:r>
+            <a:r>
+              <a:rPr lang="en-US" sz="2400" b="1" dirty="0">
                 <a:solidFill>
                   <a:srgbClr val="943733"/>
                 </a:solidFill>
                 <a:latin typeface="Calibri"/>
                 <a:cs typeface="Calibri"/>
               </a:rPr>
-              <a:t> </a:t>
-            </a:r>
-            <a:r>
-              <a:rPr sz="2400" b="1" dirty="0">
-                <a:solidFill>
-                  <a:srgbClr val="943733"/>
-                </a:solidFill>
-                <a:latin typeface="Calibri"/>
-                <a:cs typeface="Calibri"/>
-              </a:rPr>
-              <a:t>II</a:t>
-            </a:r>
-            <a:r>
-              <a:rPr sz="2400" b="1" spc="-20" dirty="0">
-                <a:solidFill>
-                  <a:srgbClr val="943733"/>
-                </a:solidFill>
-                <a:latin typeface="Calibri"/>
-                <a:cs typeface="Calibri"/>
-              </a:rPr>
-              <a:t> </a:t>
-            </a:r>
-            <a:r>
-              <a:rPr sz="2400" b="1" dirty="0">
-                <a:solidFill>
-                  <a:srgbClr val="943733"/>
-                </a:solidFill>
-                <a:latin typeface="Calibri"/>
-                <a:cs typeface="Calibri"/>
-              </a:rPr>
-              <a:t>/</a:t>
-            </a:r>
-            <a:r>
-              <a:rPr sz="2400" b="1" spc="-20" dirty="0">
-                <a:solidFill>
-                  <a:srgbClr val="943733"/>
-                </a:solidFill>
-                <a:latin typeface="Calibri"/>
-                <a:cs typeface="Calibri"/>
-              </a:rPr>
-              <a:t> </a:t>
-            </a:r>
-            <a:r>
-              <a:rPr sz="2400" b="1" dirty="0">
-                <a:solidFill>
-                  <a:srgbClr val="943733"/>
-                </a:solidFill>
-                <a:latin typeface="Calibri"/>
-                <a:cs typeface="Calibri"/>
-              </a:rPr>
-              <a:t>Project</a:t>
-            </a:r>
-            <a:r>
-              <a:rPr sz="2400" b="1" spc="-20" dirty="0">
+              <a:t>roject</a:t>
+            </a:r>
+            <a:r>
+              <a:rPr lang="en-US" sz="2400" b="1" spc="-20" dirty="0">
                 <a:solidFill>
                   <a:srgbClr val="943733"/>
                 </a:solidFill>
@@ -1729,6 +1689,16 @@
                 <a:cs typeface="Calibri"/>
               </a:rPr>
               <a:t> </a:t>
+            </a:r>
+            <a:r>
+              <a:rPr lang="en-US" sz="1600" spc="-40" dirty="0">
+                <a:solidFill>
+                  <a:srgbClr val="00B0F0"/>
+                </a:solidFill>
+                <a:latin typeface="Calibri"/>
+                <a:cs typeface="Calibri"/>
+              </a:rPr>
+              <a:t>Web </a:t>
             </a:r>
             <a:r>
               <a:rPr sz="1600" dirty="0">
@@ -2568,9 +2538,19 @@
                 <a:latin typeface="Calibri"/>
                 <a:cs typeface="Calibri"/>
               </a:rPr>
+              <a:t>I</a:t>
+            </a:r>
+            <a:r>
+              <a:rPr lang="en-US" sz="1800" b="1" spc="-25" dirty="0">
+                <a:solidFill>
+                  <a:srgbClr val="006FBF"/>
+                </a:solidFill>
+                <a:latin typeface="Calibri"/>
+                <a:cs typeface="Calibri"/>
+              </a:rPr>
               <a:t>II</a:t>
             </a:r>
-            <a:endParaRPr sz="1800">
+            <a:endParaRPr sz="1800" dirty="0">
               <a:latin typeface="Calibri"/>
               <a:cs typeface="Calibri"/>
             </a:endParaRPr>
@@ -2605,6 +2585,16 @@
               <a:t> </a:t>
             </a:r>
             <a:r>
+              <a:rPr lang="en-US" b="1" spc="-10" dirty="0">
+                <a:solidFill>
+                  <a:srgbClr val="006FBF"/>
+                </a:solidFill>
+                <a:latin typeface="Calibri"/>
+                <a:cs typeface="Calibri"/>
+              </a:rPr>
+              <a:t>06</a:t>
+            </a:r>
+            <a:r>
               <a:rPr sz="1800" b="1" spc="-10" dirty="0">
                 <a:solidFill>
                   <a:srgbClr val="006FBF"/>
@@ -2612,9 +2602,39 @@
                 <a:latin typeface="Calibri"/>
                 <a:cs typeface="Calibri"/>
               </a:rPr>
-              <a:t>11.10.2025</a:t>
-            </a:r>
-            <a:endParaRPr sz="1800">
+              <a:t>.</a:t>
+            </a:r>
+            <a:r>
+              <a:rPr lang="en-US" sz="1800" b="1" spc="-10" dirty="0">
+                <a:solidFill>
+                  <a:srgbClr val="006FBF"/>
+                </a:solidFill>
+                <a:latin typeface="Calibri"/>
+                <a:cs typeface="Calibri"/>
+              </a:rPr>
+              <a:t>02.</a:t>
+            </a:r>
+            <a:r>
+              <a:rPr sz="1800" b="1" spc="-10" dirty="0">
+                <a:solidFill>
+                  <a:srgbClr val="006FBF"/>
+                </a:solidFill>
+                <a:latin typeface="Calibri"/>
+                <a:cs typeface="Calibri"/>
+              </a:rPr>
+              <a:t>202</a:t>
+            </a:r>
+            <a:r>
+              <a:rPr lang="en-US" sz="1800" b="1" spc="-10" dirty="0">
+                <a:solidFill>
+                  <a:srgbClr val="006FBF"/>
+                </a:solidFill>
+                <a:latin typeface="Calibri"/>
+                <a:cs typeface="Calibri"/>
+              </a:rPr>
+              <a:t>6</a:t>
+            </a:r>
+            <a:endParaRPr sz="1800" dirty="0">
               <a:latin typeface="Calibri"/>
               <a:cs typeface="Calibri"/>
             </a:endParaRPr>
@@ -2795,7 +2815,7 @@
                 <a:latin typeface="Calibri"/>
                 <a:cs typeface="Calibri"/>
               </a:rPr>
-              <a:t> 28</a:t>
+              <a:t> </a:t>
             </a:r>
             <a:endParaRPr sz="1800" dirty="0">
               <a:latin typeface="Calibri"/>
@@ -10527,6 +10547,36 @@
           </a:p>
         </p:txBody>
       </p:sp>
+      <p:pic>
+        <p:nvPicPr>
+          <p:cNvPr id="5" name="Picture 4">
+            <a:extLst>
+              <a:ext uri="{FF2B5EF4-FFF2-40B4-BE49-F238E27FC236}">
+                <a16:creationId xmlns:a16="http://schemas.microsoft.com/office/drawing/2014/main" id="{9E1CE812-271C-D6B9-53A3-FE903532B794}"/>
+              </a:ext>
+            </a:extLst>
+          </p:cNvPr>
+          <p:cNvPicPr>
+            <a:picLocks noChangeAspect="1"/>
+          </p:cNvPicPr>
+          <p:nvPr/>
+        </p:nvPicPr>
+        <p:blipFill>
+          <a:blip r:embed="rId2"/>
+          <a:stretch>
+            <a:fillRect/>
+          </a:stretch>
+        </p:blipFill>
+        <p:spPr>
+          <a:xfrm>
+            <a:off x="148632" y="1529870"/>
+            <a:ext cx="8614368" cy="4047083"/>
+          </a:xfrm>
+          <a:prstGeom prst="rect">
+            <a:avLst/>
+          </a:prstGeom>
+        </p:spPr>
+      </p:pic>
     </p:spTree>
   </p:cSld>
   <p:clrMapOvr>
